--- a/assets/pptx/catalog-666.pptx
+++ b/assets/pptx/catalog-666.pptx
@@ -3302,7 +3302,7 @@
                 <a:ea typeface="Ebrima"/>
                 <a:cs typeface="Ebrima"/>
               </a:rPr>
-              <a:t>የእኔ ጌታ በፍቅርህ አኑረኝ (2x)</a:t>
+              <a:t>የእኔ ጌታ በፍቅርህ አኑረኝ 2x</a:t>
             </a:r>
           </a:p>
         </p:txBody>
@@ -3544,7 +3544,7 @@
                 <a:ea typeface="Ebrima"/>
                 <a:cs typeface="Ebrima"/>
               </a:rPr>
-              <a:t>የተሰወረ ኀጢአት እንዳይገዛኝ (2x)</a:t>
+              <a:t>የተሰወረ ኀጢአት እንዳይገዛኝ 2x</a:t>
             </a:r>
           </a:p>
         </p:txBody>
@@ -3786,7 +3786,7 @@
                 <a:ea typeface="Ebrima"/>
                 <a:cs typeface="Ebrima"/>
               </a:rPr>
-              <a:t>የዚያን ጊዜ ፍፁም እሆናለሁ (2x)</a:t>
+              <a:t>የዚያን ጊዜ ፍፁም እሆናለሁ 2x</a:t>
             </a:r>
           </a:p>
         </p:txBody>
@@ -4028,7 +4028,7 @@
                 <a:ea typeface="Ebrima"/>
                 <a:cs typeface="Ebrima"/>
               </a:rPr>
-              <a:t>ከማር ይልቅ እጅግ ይወደዳል (2x)</a:t>
+              <a:t>ከማር ይልቅ እጅግ ይወደዳል 2x</a:t>
             </a:r>
           </a:p>
         </p:txBody>
